--- a/Q3_Q4_Techniques_and_Results.pptx
+++ b/Q3_Q4_Techniques_and_Results.pptx
@@ -17655,7 +17655,7 @@
                   <a:srgbClr val="222222"/>
                 </a:solidFill>
               </a:rPr>
-              <a:t> https://drive.google.com/file/d/11wKV1DYAJMh3jUcTpf9Wxy_7zr9-00rW/view?usp=drive_link</a:t>
+              <a:t> https://drive.google.com/file/d/1iIszTUjEguX2ebVMos0Et96VCIEvwA0y/view?usp=sharing</a:t>
             </a:r>
           </a:p>
           <a:p>
